--- a/SantanderCS/report/ppt/산탄데르_ppt_template.pptx
+++ b/SantanderCS/report/ppt/산탄데르_ppt_template.pptx
@@ -261,7 +261,7 @@
           <a:p>
             <a:fld id="{2566825D-2B69-4989-8861-A6901ABADB6C}" type="datetimeFigureOut">
               <a:rPr lang="ko-KR" altLang="en-US" smtClean="0"/>
-              <a:t>2025-12-10</a:t>
+              <a:t>2025-12-12</a:t>
             </a:fld>
             <a:endParaRPr lang="ko-KR" altLang="en-US"/>
           </a:p>
@@ -429,7 +429,7 @@
           <a:p>
             <a:fld id="{2566825D-2B69-4989-8861-A6901ABADB6C}" type="datetimeFigureOut">
               <a:rPr lang="ko-KR" altLang="en-US" smtClean="0"/>
-              <a:t>2025-12-10</a:t>
+              <a:t>2025-12-12</a:t>
             </a:fld>
             <a:endParaRPr lang="ko-KR" altLang="en-US"/>
           </a:p>
@@ -607,7 +607,7 @@
           <a:p>
             <a:fld id="{2566825D-2B69-4989-8861-A6901ABADB6C}" type="datetimeFigureOut">
               <a:rPr lang="ko-KR" altLang="en-US" smtClean="0"/>
-              <a:t>2025-12-10</a:t>
+              <a:t>2025-12-12</a:t>
             </a:fld>
             <a:endParaRPr lang="ko-KR" altLang="en-US"/>
           </a:p>
@@ -775,7 +775,7 @@
           <a:p>
             <a:fld id="{2566825D-2B69-4989-8861-A6901ABADB6C}" type="datetimeFigureOut">
               <a:rPr lang="ko-KR" altLang="en-US" smtClean="0"/>
-              <a:t>2025-12-10</a:t>
+              <a:t>2025-12-12</a:t>
             </a:fld>
             <a:endParaRPr lang="ko-KR" altLang="en-US"/>
           </a:p>
@@ -1020,7 +1020,7 @@
           <a:p>
             <a:fld id="{2566825D-2B69-4989-8861-A6901ABADB6C}" type="datetimeFigureOut">
               <a:rPr lang="ko-KR" altLang="en-US" smtClean="0"/>
-              <a:t>2025-12-10</a:t>
+              <a:t>2025-12-12</a:t>
             </a:fld>
             <a:endParaRPr lang="ko-KR" altLang="en-US"/>
           </a:p>
@@ -1249,7 +1249,7 @@
           <a:p>
             <a:fld id="{2566825D-2B69-4989-8861-A6901ABADB6C}" type="datetimeFigureOut">
               <a:rPr lang="ko-KR" altLang="en-US" smtClean="0"/>
-              <a:t>2025-12-10</a:t>
+              <a:t>2025-12-12</a:t>
             </a:fld>
             <a:endParaRPr lang="ko-KR" altLang="en-US"/>
           </a:p>
@@ -1613,7 +1613,7 @@
           <a:p>
             <a:fld id="{2566825D-2B69-4989-8861-A6901ABADB6C}" type="datetimeFigureOut">
               <a:rPr lang="ko-KR" altLang="en-US" smtClean="0"/>
-              <a:t>2025-12-10</a:t>
+              <a:t>2025-12-12</a:t>
             </a:fld>
             <a:endParaRPr lang="ko-KR" altLang="en-US"/>
           </a:p>
@@ -1730,7 +1730,7 @@
           <a:p>
             <a:fld id="{2566825D-2B69-4989-8861-A6901ABADB6C}" type="datetimeFigureOut">
               <a:rPr lang="ko-KR" altLang="en-US" smtClean="0"/>
-              <a:t>2025-12-10</a:t>
+              <a:t>2025-12-12</a:t>
             </a:fld>
             <a:endParaRPr lang="ko-KR" altLang="en-US"/>
           </a:p>
@@ -1825,7 +1825,7 @@
           <a:p>
             <a:fld id="{2566825D-2B69-4989-8861-A6901ABADB6C}" type="datetimeFigureOut">
               <a:rPr lang="ko-KR" altLang="en-US" smtClean="0"/>
-              <a:t>2025-12-10</a:t>
+              <a:t>2025-12-12</a:t>
             </a:fld>
             <a:endParaRPr lang="ko-KR" altLang="en-US"/>
           </a:p>
@@ -2100,7 +2100,7 @@
           <a:p>
             <a:fld id="{2566825D-2B69-4989-8861-A6901ABADB6C}" type="datetimeFigureOut">
               <a:rPr lang="ko-KR" altLang="en-US" smtClean="0"/>
-              <a:t>2025-12-10</a:t>
+              <a:t>2025-12-12</a:t>
             </a:fld>
             <a:endParaRPr lang="ko-KR" altLang="en-US"/>
           </a:p>
@@ -2352,7 +2352,7 @@
           <a:p>
             <a:fld id="{2566825D-2B69-4989-8861-A6901ABADB6C}" type="datetimeFigureOut">
               <a:rPr lang="ko-KR" altLang="en-US" smtClean="0"/>
-              <a:t>2025-12-10</a:t>
+              <a:t>2025-12-12</a:t>
             </a:fld>
             <a:endParaRPr lang="ko-KR" altLang="en-US"/>
           </a:p>
@@ -2563,7 +2563,7 @@
           <a:p>
             <a:fld id="{2566825D-2B69-4989-8861-A6901ABADB6C}" type="datetimeFigureOut">
               <a:rPr lang="ko-KR" altLang="en-US" smtClean="0"/>
-              <a:t>2025-12-10</a:t>
+              <a:t>2025-12-12</a:t>
             </a:fld>
             <a:endParaRPr lang="ko-KR" altLang="en-US"/>
           </a:p>
@@ -2968,6 +2968,54 @@
           <a:chExt cx="0" cy="0"/>
         </a:xfrm>
       </p:grpSpPr>
+      <p:pic>
+        <p:nvPicPr>
+          <p:cNvPr id="1026" name="Picture 2" descr="Santander Private Banking Expands Global Presence with First Regional  Headquarters in DIFC - Asian Wealth Management and Asian Private Banking">
+            <a:extLst>
+              <a:ext uri="{FF2B5EF4-FFF2-40B4-BE49-F238E27FC236}">
+                <a16:creationId xmlns:a16="http://schemas.microsoft.com/office/drawing/2014/main" id="{A9EEAF66-5B4F-E0DA-BAEB-9F2744C63209}"/>
+              </a:ext>
+            </a:extLst>
+          </p:cNvPr>
+          <p:cNvPicPr>
+            <a:picLocks noChangeAspect="1" noChangeArrowheads="1"/>
+          </p:cNvPicPr>
+          <p:nvPr/>
+        </p:nvPicPr>
+        <p:blipFill>
+          <a:blip r:embed="rId2">
+            <a:alphaModFix amt="20000"/>
+            <a:extLst>
+              <a:ext uri="{28A0092B-C50C-407E-A947-70E740481C1C}">
+                <a14:useLocalDpi xmlns:a14="http://schemas.microsoft.com/office/drawing/2010/main" val="0"/>
+              </a:ext>
+            </a:extLst>
+          </a:blip>
+          <a:srcRect/>
+          <a:stretch>
+            <a:fillRect/>
+          </a:stretch>
+        </p:blipFill>
+        <p:spPr bwMode="auto">
+          <a:xfrm>
+            <a:off x="-554404" y="-297031"/>
+            <a:ext cx="13354762" cy="7333098"/>
+          </a:xfrm>
+          <a:prstGeom prst="rect">
+            <a:avLst/>
+          </a:prstGeom>
+          <a:noFill/>
+          <a:extLst>
+            <a:ext uri="{909E8E84-426E-40DD-AFC4-6F175D3DCCD1}">
+              <a14:hiddenFill xmlns:a14="http://schemas.microsoft.com/office/drawing/2010/main">
+                <a:solidFill>
+                  <a:srgbClr val="FFFFFF"/>
+                </a:solidFill>
+              </a14:hiddenFill>
+            </a:ext>
+          </a:extLst>
+        </p:spPr>
+      </p:pic>
       <p:sp>
         <p:nvSpPr>
           <p:cNvPr id="4" name="직사각형 3">
@@ -3039,7 +3087,7 @@
         </p:nvSpPr>
         <p:spPr>
           <a:xfrm>
-            <a:off x="2898028" y="2008284"/>
+            <a:off x="2901464" y="2335010"/>
             <a:ext cx="9072359" cy="2387600"/>
           </a:xfrm>
           <a:ln>
@@ -3054,89 +3102,89 @@
           <a:p>
             <a:pPr algn="r"/>
             <a:r>
-              <a:rPr lang="ko-KR" altLang="en-US" sz="5500" err="1">
+              <a:rPr lang="ko-KR" altLang="en-US" sz="5800" dirty="0" err="1">
                 <a:solidFill>
                   <a:srgbClr val="EC0000"/>
                 </a:solidFill>
-                <a:latin typeface="Arial"/>
-                <a:ea typeface="맑은 고딕"/>
-                <a:cs typeface="Arial"/>
+                <a:latin typeface="Microsoft GothicNeo" panose="020B0500000101010101" pitchFamily="50" charset="-127"/>
+                <a:ea typeface="Microsoft GothicNeo" panose="020B0500000101010101" pitchFamily="50" charset="-127"/>
+                <a:cs typeface="Microsoft GothicNeo" panose="020B0500000101010101" pitchFamily="50" charset="-127"/>
               </a:rPr>
               <a:t>Kaggle</a:t>
             </a:r>
             <a:r>
-              <a:rPr lang="ko-KR" altLang="en-US" sz="5500" dirty="0">
+              <a:rPr lang="ko-KR" altLang="en-US" sz="5800" dirty="0">
                 <a:solidFill>
                   <a:srgbClr val="EC0000"/>
                 </a:solidFill>
-                <a:latin typeface="Arial"/>
-                <a:ea typeface="맑은 고딕"/>
-                <a:cs typeface="Arial"/>
+                <a:latin typeface="Microsoft GothicNeo" panose="020B0500000101010101" pitchFamily="50" charset="-127"/>
+                <a:ea typeface="Microsoft GothicNeo" panose="020B0500000101010101" pitchFamily="50" charset="-127"/>
+                <a:cs typeface="Microsoft GothicNeo" panose="020B0500000101010101" pitchFamily="50" charset="-127"/>
               </a:rPr>
               <a:t> </a:t>
             </a:r>
             <a:r>
-              <a:rPr lang="ko-KR" altLang="en-US" sz="5500" err="1">
+              <a:rPr lang="ko-KR" altLang="en-US" sz="5800" dirty="0" err="1">
                 <a:solidFill>
                   <a:srgbClr val="EC0000"/>
                 </a:solidFill>
-                <a:latin typeface="Arial"/>
-                <a:ea typeface="맑은 고딕"/>
-                <a:cs typeface="Arial"/>
+                <a:latin typeface="Microsoft GothicNeo" panose="020B0500000101010101" pitchFamily="50" charset="-127"/>
+                <a:ea typeface="Microsoft GothicNeo" panose="020B0500000101010101" pitchFamily="50" charset="-127"/>
+                <a:cs typeface="Microsoft GothicNeo" panose="020B0500000101010101" pitchFamily="50" charset="-127"/>
               </a:rPr>
               <a:t>Santander</a:t>
             </a:r>
             <a:r>
-              <a:rPr lang="ko-KR" altLang="en-US" sz="5500" dirty="0">
+              <a:rPr lang="ko-KR" altLang="en-US" sz="5800" dirty="0">
                 <a:solidFill>
                   <a:srgbClr val="EC0000"/>
                 </a:solidFill>
-                <a:latin typeface="Arial"/>
-                <a:ea typeface="맑은 고딕"/>
-                <a:cs typeface="Arial"/>
+                <a:latin typeface="Microsoft GothicNeo" panose="020B0500000101010101" pitchFamily="50" charset="-127"/>
+                <a:ea typeface="Microsoft GothicNeo" panose="020B0500000101010101" pitchFamily="50" charset="-127"/>
+                <a:cs typeface="Microsoft GothicNeo" panose="020B0500000101010101" pitchFamily="50" charset="-127"/>
               </a:rPr>
               <a:t> Bank </a:t>
             </a:r>
             <a:r>
-              <a:rPr lang="ko-KR" altLang="en-US" sz="5500" err="1">
+              <a:rPr lang="ko-KR" altLang="en-US" sz="5800" dirty="0" err="1">
                 <a:solidFill>
                   <a:srgbClr val="EC0000"/>
                 </a:solidFill>
-                <a:latin typeface="Arial"/>
-                <a:ea typeface="맑은 고딕"/>
-                <a:cs typeface="Arial"/>
+                <a:latin typeface="Microsoft GothicNeo" panose="020B0500000101010101" pitchFamily="50" charset="-127"/>
+                <a:ea typeface="Microsoft GothicNeo" panose="020B0500000101010101" pitchFamily="50" charset="-127"/>
+                <a:cs typeface="Microsoft GothicNeo" panose="020B0500000101010101" pitchFamily="50" charset="-127"/>
               </a:rPr>
               <a:t>Customer</a:t>
             </a:r>
             <a:r>
-              <a:rPr lang="ko-KR" altLang="en-US" sz="5500" dirty="0">
+              <a:rPr lang="ko-KR" altLang="en-US" sz="5800" dirty="0">
                 <a:solidFill>
                   <a:srgbClr val="EC0000"/>
                 </a:solidFill>
-                <a:latin typeface="Arial"/>
-                <a:ea typeface="맑은 고딕"/>
-                <a:cs typeface="Arial"/>
+                <a:latin typeface="Microsoft GothicNeo" panose="020B0500000101010101" pitchFamily="50" charset="-127"/>
+                <a:ea typeface="Microsoft GothicNeo" panose="020B0500000101010101" pitchFamily="50" charset="-127"/>
+                <a:cs typeface="Microsoft GothicNeo" panose="020B0500000101010101" pitchFamily="50" charset="-127"/>
               </a:rPr>
               <a:t> </a:t>
             </a:r>
             <a:r>
-              <a:rPr lang="ko-KR" altLang="en-US" sz="5500" err="1">
+              <a:rPr lang="ko-KR" altLang="en-US" sz="5800" dirty="0" err="1">
                 <a:solidFill>
                   <a:srgbClr val="EC0000"/>
                 </a:solidFill>
-                <a:latin typeface="Arial"/>
-                <a:ea typeface="맑은 고딕"/>
-                <a:cs typeface="Arial"/>
+                <a:latin typeface="Microsoft GothicNeo" panose="020B0500000101010101" pitchFamily="50" charset="-127"/>
+                <a:ea typeface="Microsoft GothicNeo" panose="020B0500000101010101" pitchFamily="50" charset="-127"/>
+                <a:cs typeface="Microsoft GothicNeo" panose="020B0500000101010101" pitchFamily="50" charset="-127"/>
               </a:rPr>
               <a:t>Satisfaction</a:t>
             </a:r>
-            <a:endParaRPr lang="ko-KR" sz="5500">
+            <a:endParaRPr lang="ko-KR" sz="5800" dirty="0">
               <a:solidFill>
                 <a:srgbClr val="EC0000"/>
               </a:solidFill>
-              <a:latin typeface="Arial"/>
-              <a:ea typeface="맑은 고딕"/>
-              <a:cs typeface="Arial"/>
+              <a:latin typeface="Microsoft GothicNeo" panose="020B0500000101010101" pitchFamily="50" charset="-127"/>
+              <a:ea typeface="Microsoft GothicNeo" panose="020B0500000101010101" pitchFamily="50" charset="-127"/>
+              <a:cs typeface="Microsoft GothicNeo" panose="020B0500000101010101" pitchFamily="50" charset="-127"/>
             </a:endParaRPr>
           </a:p>
         </p:txBody>
@@ -3226,7 +3274,7 @@
           <p:nvPr/>
         </p:nvPicPr>
         <p:blipFill>
-          <a:blip r:embed="rId2"/>
+          <a:blip r:embed="rId3"/>
           <a:stretch>
             <a:fillRect/>
           </a:stretch>
@@ -3271,6 +3319,60 @@
           <a:chExt cx="0" cy="0"/>
         </a:xfrm>
       </p:grpSpPr>
+      <p:sp>
+        <p:nvSpPr>
+          <p:cNvPr id="4" name="직사각형 3">
+            <a:extLst>
+              <a:ext uri="{FF2B5EF4-FFF2-40B4-BE49-F238E27FC236}">
+                <a16:creationId xmlns:a16="http://schemas.microsoft.com/office/drawing/2014/main" id="{E202C4F1-33A1-D42B-B70C-CE7C460299F7}"/>
+              </a:ext>
+            </a:extLst>
+          </p:cNvPr>
+          <p:cNvSpPr/>
+          <p:nvPr/>
+        </p:nvSpPr>
+        <p:spPr>
+          <a:xfrm>
+            <a:off x="-169334" y="-105030"/>
+            <a:ext cx="12848166" cy="761198"/>
+          </a:xfrm>
+          <a:prstGeom prst="rect">
+            <a:avLst/>
+          </a:prstGeom>
+          <a:solidFill>
+            <a:schemeClr val="bg1">
+              <a:lumMod val="95000"/>
+            </a:schemeClr>
+          </a:solidFill>
+          <a:ln>
+            <a:noFill/>
+          </a:ln>
+        </p:spPr>
+        <p:style>
+          <a:lnRef idx="2">
+            <a:schemeClr val="accent1">
+              <a:shade val="15000"/>
+            </a:schemeClr>
+          </a:lnRef>
+          <a:fillRef idx="1">
+            <a:schemeClr val="accent1"/>
+          </a:fillRef>
+          <a:effectRef idx="0">
+            <a:schemeClr val="accent1"/>
+          </a:effectRef>
+          <a:fontRef idx="minor">
+            <a:schemeClr val="lt1"/>
+          </a:fontRef>
+        </p:style>
+        <p:txBody>
+          <a:bodyPr rtlCol="0" anchor="ctr"/>
+          <a:lstStyle/>
+          <a:p>
+            <a:pPr algn="ctr"/>
+            <a:endParaRPr lang="ko-KR" altLang="en-US"/>
+          </a:p>
+        </p:txBody>
+      </p:sp>
       <p:graphicFrame>
         <p:nvGraphicFramePr>
           <p:cNvPr id="14" name="내용 개체 틀 13">
@@ -5901,60 +6003,6 @@
       </p:sp>
       <p:sp>
         <p:nvSpPr>
-          <p:cNvPr id="17" name="직사각형 16">
-            <a:extLst>
-              <a:ext uri="{FF2B5EF4-FFF2-40B4-BE49-F238E27FC236}">
-                <a16:creationId xmlns:a16="http://schemas.microsoft.com/office/drawing/2014/main" id="{530864EF-BE33-C278-F757-615463AABB13}"/>
-              </a:ext>
-            </a:extLst>
-          </p:cNvPr>
-          <p:cNvSpPr/>
-          <p:nvPr/>
-        </p:nvSpPr>
-        <p:spPr>
-          <a:xfrm>
-            <a:off x="-169334" y="0"/>
-            <a:ext cx="12848166" cy="656167"/>
-          </a:xfrm>
-          <a:prstGeom prst="rect">
-            <a:avLst/>
-          </a:prstGeom>
-          <a:solidFill>
-            <a:schemeClr val="bg1">
-              <a:lumMod val="95000"/>
-            </a:schemeClr>
-          </a:solidFill>
-          <a:ln>
-            <a:noFill/>
-          </a:ln>
-        </p:spPr>
-        <p:style>
-          <a:lnRef idx="2">
-            <a:schemeClr val="accent1">
-              <a:shade val="15000"/>
-            </a:schemeClr>
-          </a:lnRef>
-          <a:fillRef idx="1">
-            <a:schemeClr val="accent1"/>
-          </a:fillRef>
-          <a:effectRef idx="0">
-            <a:schemeClr val="accent1"/>
-          </a:effectRef>
-          <a:fontRef idx="minor">
-            <a:schemeClr val="lt1"/>
-          </a:fontRef>
-        </p:style>
-        <p:txBody>
-          <a:bodyPr rtlCol="0" anchor="ctr"/>
-          <a:lstStyle/>
-          <a:p>
-            <a:pPr algn="ctr"/>
-            <a:endParaRPr lang="ko-KR" altLang="en-US"/>
-          </a:p>
-        </p:txBody>
-      </p:sp>
-      <p:sp>
-        <p:nvSpPr>
           <p:cNvPr id="19" name="TextBox 18">
             <a:extLst>
               <a:ext uri="{FF2B5EF4-FFF2-40B4-BE49-F238E27FC236}">
@@ -6164,10 +6212,10 @@
       </p:sp>
       <p:sp>
         <p:nvSpPr>
-          <p:cNvPr id="5" name="직사각형 4">
+          <p:cNvPr id="2" name="직사각형 1">
             <a:extLst>
               <a:ext uri="{FF2B5EF4-FFF2-40B4-BE49-F238E27FC236}">
-                <a16:creationId xmlns:a16="http://schemas.microsoft.com/office/drawing/2014/main" id="{40F46692-53DA-0494-203F-668EE0154D58}"/>
+                <a16:creationId xmlns:a16="http://schemas.microsoft.com/office/drawing/2014/main" id="{0E436550-25B1-BB35-4B5D-1CDD191B02A0}"/>
               </a:ext>
             </a:extLst>
           </p:cNvPr>
@@ -6176,14 +6224,17 @@
         </p:nvSpPr>
         <p:spPr>
           <a:xfrm>
-            <a:off x="455083" y="1026583"/>
-            <a:ext cx="52916" cy="1121833"/>
+            <a:off x="444500" y="1026583"/>
+            <a:ext cx="63499" cy="1291166"/>
           </a:xfrm>
           <a:prstGeom prst="rect">
             <a:avLst/>
           </a:prstGeom>
           <a:solidFill>
-            <a:srgbClr val="C00000"/>
+            <a:schemeClr val="tx1">
+              <a:lumMod val="85000"/>
+              <a:lumOff val="15000"/>
+            </a:schemeClr>
           </a:solidFill>
           <a:ln>
             <a:noFill/>
@@ -6288,8 +6339,8 @@
         </p:nvSpPr>
         <p:spPr>
           <a:xfrm>
-            <a:off x="-169334" y="0"/>
-            <a:ext cx="12848166" cy="656167"/>
+            <a:off x="-169334" y="-105030"/>
+            <a:ext cx="12848166" cy="761198"/>
           </a:xfrm>
           <a:prstGeom prst="rect">
             <a:avLst/>
@@ -6482,7 +6533,7 @@
               <a:buChar char="-"/>
             </a:pPr>
             <a:r>
-              <a:rPr lang="ko-KR" altLang="en-US" sz="1300">
+              <a:rPr lang="ko-KR" altLang="en-US" sz="1300" dirty="0">
                 <a:latin typeface="Microsoft GothicNeo"/>
                 <a:ea typeface="Microsoft GothicNeo"/>
                 <a:cs typeface="Microsoft GothicNeo"/>
@@ -6687,10 +6738,10 @@
       </p:grpSpPr>
       <p:sp>
         <p:nvSpPr>
-          <p:cNvPr id="11" name="직사각형 10">
+          <p:cNvPr id="12" name="직사각형 11">
             <a:extLst>
               <a:ext uri="{FF2B5EF4-FFF2-40B4-BE49-F238E27FC236}">
-                <a16:creationId xmlns:a16="http://schemas.microsoft.com/office/drawing/2014/main" id="{186036B6-C51E-BC8E-8382-B95EBC7B66C3}"/>
+                <a16:creationId xmlns:a16="http://schemas.microsoft.com/office/drawing/2014/main" id="{25FD183E-6EE8-A470-1148-E5E6087232C0}"/>
               </a:ext>
             </a:extLst>
           </p:cNvPr>
@@ -6699,15 +6750,15 @@
         </p:nvSpPr>
         <p:spPr>
           <a:xfrm>
-            <a:off x="-878417" y="2455334"/>
-            <a:ext cx="13853583" cy="3460750"/>
+            <a:off x="-169334" y="-105030"/>
+            <a:ext cx="12848166" cy="761198"/>
           </a:xfrm>
           <a:prstGeom prst="rect">
             <a:avLst/>
           </a:prstGeom>
           <a:solidFill>
             <a:schemeClr val="bg1">
-              <a:lumMod val="85000"/>
+              <a:lumMod val="95000"/>
             </a:schemeClr>
           </a:solidFill>
           <a:ln>
@@ -6741,10 +6792,10 @@
       </p:sp>
       <p:sp>
         <p:nvSpPr>
-          <p:cNvPr id="5" name="직사각형 4">
+          <p:cNvPr id="11" name="직사각형 10">
             <a:extLst>
               <a:ext uri="{FF2B5EF4-FFF2-40B4-BE49-F238E27FC236}">
-                <a16:creationId xmlns:a16="http://schemas.microsoft.com/office/drawing/2014/main" id="{F8755259-13E7-FDFE-ABAB-E7205DC8A699}"/>
+                <a16:creationId xmlns:a16="http://schemas.microsoft.com/office/drawing/2014/main" id="{186036B6-C51E-BC8E-8382-B95EBC7B66C3}"/>
               </a:ext>
             </a:extLst>
           </p:cNvPr>
@@ -6753,15 +6804,15 @@
         </p:nvSpPr>
         <p:spPr>
           <a:xfrm>
-            <a:off x="-169334" y="0"/>
-            <a:ext cx="12848166" cy="656167"/>
+            <a:off x="-878417" y="2455334"/>
+            <a:ext cx="13853583" cy="3460750"/>
           </a:xfrm>
           <a:prstGeom prst="rect">
             <a:avLst/>
           </a:prstGeom>
           <a:solidFill>
             <a:schemeClr val="bg1">
-              <a:lumMod val="95000"/>
+              <a:lumMod val="85000"/>
             </a:schemeClr>
           </a:solidFill>
           <a:ln>
@@ -6948,7 +6999,7 @@
               <a:t>NPS(Net </a:t>
             </a:r>
             <a:r>
-              <a:rPr lang="ko-KR" altLang="en-US" err="1">
+              <a:rPr lang="ko-KR" altLang="en-US" dirty="0" err="1">
                 <a:latin typeface="Microsoft GothicNeo"/>
                 <a:ea typeface="Microsoft GothicNeo"/>
                 <a:cs typeface="Microsoft GothicNeo"/>
@@ -6964,7 +7015,7 @@
               <a:t> </a:t>
             </a:r>
             <a:r>
-              <a:rPr lang="ko-KR" altLang="en-US" err="1">
+              <a:rPr lang="ko-KR" altLang="en-US" dirty="0" err="1">
                 <a:latin typeface="Microsoft GothicNeo"/>
                 <a:ea typeface="Microsoft GothicNeo"/>
                 <a:cs typeface="Microsoft GothicNeo"/>
@@ -6979,7 +7030,7 @@
               </a:rPr>
               <a:t>)</a:t>
             </a:r>
-            <a:endParaRPr lang="ko-KR"/>
+            <a:endParaRPr lang="ko-KR" dirty="0"/>
           </a:p>
           <a:p>
             <a:pPr marL="400050" lvl="2" indent="228600">
@@ -7012,7 +7063,7 @@
               <a:t>계산 : 추천 고객 비율 - </a:t>
             </a:r>
             <a:r>
-              <a:rPr lang="ko-KR" altLang="en-US" sz="1300" err="1">
+              <a:rPr lang="ko-KR" altLang="en-US" sz="1300" dirty="0" err="1">
                 <a:latin typeface="Microsoft GothicNeo"/>
                 <a:ea typeface="Microsoft GothicNeo"/>
                 <a:cs typeface="Microsoft GothicNeo"/>
@@ -7151,10 +7202,10 @@
       </p:sp>
       <p:sp>
         <p:nvSpPr>
-          <p:cNvPr id="14" name="직사각형 13">
+          <p:cNvPr id="2" name="직사각형 1">
             <a:extLst>
               <a:ext uri="{FF2B5EF4-FFF2-40B4-BE49-F238E27FC236}">
-                <a16:creationId xmlns:a16="http://schemas.microsoft.com/office/drawing/2014/main" id="{F3CC7E79-6F0A-4DA2-DA86-8461ACD51F9A}"/>
+                <a16:creationId xmlns:a16="http://schemas.microsoft.com/office/drawing/2014/main" id="{C1081C41-F979-D112-2770-676D608DF071}"/>
               </a:ext>
             </a:extLst>
           </p:cNvPr>
@@ -7163,8 +7214,8 @@
         </p:nvSpPr>
         <p:spPr>
           <a:xfrm>
-            <a:off x="455083" y="1026583"/>
-            <a:ext cx="52916" cy="1121833"/>
+            <a:off x="444500" y="1026583"/>
+            <a:ext cx="63499" cy="1291166"/>
           </a:xfrm>
           <a:prstGeom prst="rect">
             <a:avLst/>
@@ -7233,10 +7284,10 @@
       </p:grpSpPr>
       <p:sp>
         <p:nvSpPr>
-          <p:cNvPr id="5" name="직사각형 4">
+          <p:cNvPr id="3" name="직사각형 2">
             <a:extLst>
               <a:ext uri="{FF2B5EF4-FFF2-40B4-BE49-F238E27FC236}">
-                <a16:creationId xmlns:a16="http://schemas.microsoft.com/office/drawing/2014/main" id="{C8AF6847-62D9-5244-72FB-5D0F43D66920}"/>
+                <a16:creationId xmlns:a16="http://schemas.microsoft.com/office/drawing/2014/main" id="{BC40141B-E6E7-0BB7-4E05-1296C08798EC}"/>
               </a:ext>
             </a:extLst>
           </p:cNvPr>
@@ -7245,8 +7296,8 @@
         </p:nvSpPr>
         <p:spPr>
           <a:xfrm>
-            <a:off x="-169334" y="0"/>
-            <a:ext cx="12848166" cy="656167"/>
+            <a:off x="-169334" y="-105030"/>
+            <a:ext cx="12848166" cy="761198"/>
           </a:xfrm>
           <a:prstGeom prst="rect">
             <a:avLst/>
@@ -8036,10 +8087,10 @@
       </p:grpSpPr>
       <p:sp>
         <p:nvSpPr>
-          <p:cNvPr id="5" name="직사각형 4">
+          <p:cNvPr id="8" name="직사각형 7">
             <a:extLst>
               <a:ext uri="{FF2B5EF4-FFF2-40B4-BE49-F238E27FC236}">
-                <a16:creationId xmlns:a16="http://schemas.microsoft.com/office/drawing/2014/main" id="{EB132456-2703-A257-C348-A2DB5EC64678}"/>
+                <a16:creationId xmlns:a16="http://schemas.microsoft.com/office/drawing/2014/main" id="{1DAB63CC-B169-1B96-D538-2C47D1B5E861}"/>
               </a:ext>
             </a:extLst>
           </p:cNvPr>
@@ -8048,8 +8099,8 @@
         </p:nvSpPr>
         <p:spPr>
           <a:xfrm>
-            <a:off x="-169334" y="0"/>
-            <a:ext cx="12848166" cy="656167"/>
+            <a:off x="-169334" y="-105030"/>
+            <a:ext cx="12848166" cy="761198"/>
           </a:xfrm>
           <a:prstGeom prst="rect">
             <a:avLst/>
@@ -8879,10 +8930,10 @@
       </p:grpSpPr>
       <p:sp>
         <p:nvSpPr>
-          <p:cNvPr id="5" name="직사각형 4">
+          <p:cNvPr id="3" name="직사각형 2">
             <a:extLst>
               <a:ext uri="{FF2B5EF4-FFF2-40B4-BE49-F238E27FC236}">
-                <a16:creationId xmlns:a16="http://schemas.microsoft.com/office/drawing/2014/main" id="{E65A27B8-CC1B-572D-0B71-E756AF575F72}"/>
+                <a16:creationId xmlns:a16="http://schemas.microsoft.com/office/drawing/2014/main" id="{29E6ADF1-65A3-E327-34E1-0A73447C99F1}"/>
               </a:ext>
             </a:extLst>
           </p:cNvPr>
@@ -8891,8 +8942,8 @@
         </p:nvSpPr>
         <p:spPr>
           <a:xfrm>
-            <a:off x="-169334" y="0"/>
-            <a:ext cx="12848166" cy="656167"/>
+            <a:off x="-169334" y="-105030"/>
+            <a:ext cx="12848166" cy="761198"/>
           </a:xfrm>
           <a:prstGeom prst="rect">
             <a:avLst/>
@@ -9621,10 +9672,10 @@
       </p:grpSpPr>
       <p:sp>
         <p:nvSpPr>
-          <p:cNvPr id="5" name="직사각형 4">
+          <p:cNvPr id="8" name="직사각형 7">
             <a:extLst>
               <a:ext uri="{FF2B5EF4-FFF2-40B4-BE49-F238E27FC236}">
-                <a16:creationId xmlns:a16="http://schemas.microsoft.com/office/drawing/2014/main" id="{8F34F029-D352-A136-1D88-BFEC612C4D9F}"/>
+                <a16:creationId xmlns:a16="http://schemas.microsoft.com/office/drawing/2014/main" id="{EFB68EC9-CA0F-AA07-03E7-0DF664E6DAA7}"/>
               </a:ext>
             </a:extLst>
           </p:cNvPr>
@@ -9633,8 +9684,8 @@
         </p:nvSpPr>
         <p:spPr>
           <a:xfrm>
-            <a:off x="-169334" y="0"/>
-            <a:ext cx="12848166" cy="656167"/>
+            <a:off x="-169334" y="-105030"/>
+            <a:ext cx="12848166" cy="761198"/>
           </a:xfrm>
           <a:prstGeom prst="rect">
             <a:avLst/>
@@ -10383,10 +10434,10 @@
       </p:grpSpPr>
       <p:sp>
         <p:nvSpPr>
-          <p:cNvPr id="5" name="직사각형 4">
+          <p:cNvPr id="3" name="직사각형 2">
             <a:extLst>
               <a:ext uri="{FF2B5EF4-FFF2-40B4-BE49-F238E27FC236}">
-                <a16:creationId xmlns:a16="http://schemas.microsoft.com/office/drawing/2014/main" id="{20FF06F9-E961-6383-D88A-48490647BF38}"/>
+                <a16:creationId xmlns:a16="http://schemas.microsoft.com/office/drawing/2014/main" id="{E01807A1-E39D-D47C-5094-C9AF9AC19804}"/>
               </a:ext>
             </a:extLst>
           </p:cNvPr>
@@ -10395,8 +10446,8 @@
         </p:nvSpPr>
         <p:spPr>
           <a:xfrm>
-            <a:off x="-169334" y="0"/>
-            <a:ext cx="12848166" cy="656167"/>
+            <a:off x="-169334" y="-105030"/>
+            <a:ext cx="12848166" cy="761198"/>
           </a:xfrm>
           <a:prstGeom prst="rect">
             <a:avLst/>
@@ -11171,10 +11222,10 @@
       </p:grpSpPr>
       <p:sp>
         <p:nvSpPr>
-          <p:cNvPr id="5" name="직사각형 4">
+          <p:cNvPr id="8" name="직사각형 7">
             <a:extLst>
               <a:ext uri="{FF2B5EF4-FFF2-40B4-BE49-F238E27FC236}">
-                <a16:creationId xmlns:a16="http://schemas.microsoft.com/office/drawing/2014/main" id="{C5F054DB-2E64-CA07-641F-F8B38C8ECF5D}"/>
+                <a16:creationId xmlns:a16="http://schemas.microsoft.com/office/drawing/2014/main" id="{BCA24538-9D04-57C0-6109-9092EAC1EF9E}"/>
               </a:ext>
             </a:extLst>
           </p:cNvPr>
@@ -11183,8 +11234,8 @@
         </p:nvSpPr>
         <p:spPr>
           <a:xfrm>
-            <a:off x="-169334" y="0"/>
-            <a:ext cx="12848166" cy="656167"/>
+            <a:off x="-169334" y="-105030"/>
+            <a:ext cx="12848166" cy="761198"/>
           </a:xfrm>
           <a:prstGeom prst="rect">
             <a:avLst/>
